--- a/dist/sunum/manyetik-alan.pptx
+++ b/dist/sunum/manyetik-alan.pptx
@@ -4766,7 +4766,7 @@
       </p:grpSpPr>
       <p:pic>
         <p:nvPicPr>
-          <p:cNvPr id="2" name="Image 0" descr="/tmp/claude-1000/-opt-dersler/8a8328c3-841c-44fa-b76f-82572d338d3d/scratchpad/d4/sek/manyetik-alan-kapak.jpg">    </p:cNvPr>
+          <p:cNvPr id="2" name="Image 0" descr="/tmp/claude-1000/-opt-dersler/8a8328c3-841c-44fa-b76f-82572d338d3d/scratchpad/d5/sek/manyetik-alan-kapak.jpg">    </p:cNvPr>
           <p:cNvPicPr>
             <a:picLocks noChangeAspect="1"/>
           </p:cNvPicPr>
@@ -5419,69 +5419,6 @@
         </p:nvSpPr>
         <p:spPr>
           <a:xfrm>
-            <a:off x="9448495" y="6309360"/>
-            <a:ext cx="2103120" cy="274320"/>
-          </a:xfrm>
-          <a:prstGeom prst="roundRect">
-            <a:avLst>
-              <a:gd name="adj" fmla="val 50000"/>
-            </a:avLst>
-          </a:prstGeom>
-          <a:solidFill>
-            <a:srgbClr val="0E1426">
-              <a:alpha val="65000"/>
-            </a:srgbClr>
-          </a:solidFill>
-          <a:ln/>
-        </p:spPr>
-      </p:sp>
-      <p:sp>
-        <p:nvSpPr>
-          <p:cNvPr id="22" name="Text 19"/>
-          <p:cNvSpPr txBox="1"/>
-          <p:nvPr/>
-        </p:nvSpPr>
-        <p:spPr>
-          <a:xfrm>
-            <a:off x="9448495" y="6309360"/>
-            <a:ext cx="2103120" cy="274320"/>
-          </a:xfrm>
-          <a:prstGeom prst="rect">
-            <a:avLst/>
-          </a:prstGeom>
-          <a:noFill/>
-          <a:ln/>
-        </p:spPr>
-        <p:txBody>
-          <a:bodyPr wrap="square" lIns="0" tIns="0" rIns="0" bIns="0" rtlCol="0" anchor="ctr"/>
-          <a:lstStyle/>
-          <a:p>
-            <a:pPr algn="ctr" indent="0" marL="0">
-              <a:buNone/>
-            </a:pPr>
-            <a:r>
-              <a:rPr lang="en-US" sz="900" dirty="0">
-                <a:solidFill>
-                  <a:srgbClr val="E4E9F5"/>
-                </a:solidFill>
-                <a:latin typeface="Calibri" pitchFamily="34" charset="0"/>
-                <a:ea typeface="Calibri" pitchFamily="34" charset="-122"/>
-                <a:cs typeface="Calibri" pitchFamily="34" charset="-120"/>
-              </a:rPr>
-              <a:t>Görsel: yapay zekâ ile üretildi</a:t>
-            </a:r>
-            <a:endParaRPr lang="en-US" sz="900" dirty="0"/>
-          </a:p>
-        </p:txBody>
-      </p:sp>
-      <p:sp>
-        <p:nvSpPr>
-          <p:cNvPr id="23" name="Shape 20"/>
-          <p:cNvSpPr/>
-          <p:nvPr/>
-        </p:nvSpPr>
-        <p:spPr>
-          <a:xfrm>
             <a:off x="640080" y="6382512"/>
             <a:ext cx="128016" cy="128016"/>
           </a:xfrm>
@@ -5498,7 +5435,7 @@
       </p:sp>
       <p:sp>
         <p:nvSpPr>
-          <p:cNvPr id="24" name="Text 21"/>
+          <p:cNvPr id="22" name="Text 19"/>
           <p:cNvSpPr txBox="1"/>
           <p:nvPr/>
         </p:nvSpPr>
@@ -7420,7 +7357,7 @@
       </p:sp>
       <p:pic>
         <p:nvPicPr>
-          <p:cNvPr id="14" name="Image 0" descr="/tmp/claude-1000/-opt-dersler/8a8328c3-841c-44fa-b76f-82572d338d3d/scratchpad/d4/sek/manyetik-alan-02.png">    </p:cNvPr>
+          <p:cNvPr id="14" name="Image 0" descr="/tmp/claude-1000/-opt-dersler/8a8328c3-841c-44fa-b76f-82572d338d3d/scratchpad/d5/sek/manyetik-alan-02.png">    </p:cNvPr>
           <p:cNvPicPr>
             <a:picLocks noChangeAspect="1"/>
           </p:cNvPicPr>
@@ -10151,7 +10088,7 @@
       </p:sp>
       <p:pic>
         <p:nvPicPr>
-          <p:cNvPr id="17" name="Image 0" descr="/tmp/claude-1000/-opt-dersler/8a8328c3-841c-44fa-b76f-82572d338d3d/scratchpad/d4/sek/manyetik-alan-03.png">    </p:cNvPr>
+          <p:cNvPr id="17" name="Image 0" descr="/tmp/claude-1000/-opt-dersler/8a8328c3-841c-44fa-b76f-82572d338d3d/scratchpad/d5/sek/manyetik-alan-03.png">    </p:cNvPr>
           <p:cNvPicPr>
             <a:picLocks noChangeAspect="1"/>
           </p:cNvPicPr>
@@ -14854,7 +14791,7 @@
       </p:sp>
       <p:pic>
         <p:nvPicPr>
-          <p:cNvPr id="16" name="Image 0" descr="/tmp/claude-1000/-opt-dersler/8a8328c3-841c-44fa-b76f-82572d338d3d/scratchpad/d4/sek/manyetik-alan-04.png">    </p:cNvPr>
+          <p:cNvPr id="16" name="Image 0" descr="/tmp/claude-1000/-opt-dersler/8a8328c3-841c-44fa-b76f-82572d338d3d/scratchpad/d5/sek/manyetik-alan-04.png">    </p:cNvPr>
           <p:cNvPicPr>
             <a:picLocks noChangeAspect="1"/>
           </p:cNvPicPr>
@@ -16444,7 +16381,7 @@
       </p:sp>
       <p:pic>
         <p:nvPicPr>
-          <p:cNvPr id="15" name="Image 0" descr="/tmp/claude-1000/-opt-dersler/8a8328c3-841c-44fa-b76f-82572d338d3d/scratchpad/d4/sek/manyetik-alan-05.png">    </p:cNvPr>
+          <p:cNvPr id="15" name="Image 0" descr="/tmp/claude-1000/-opt-dersler/8a8328c3-841c-44fa-b76f-82572d338d3d/scratchpad/d5/sek/manyetik-alan-05.png">    </p:cNvPr>
           <p:cNvPicPr>
             <a:picLocks noChangeAspect="1"/>
           </p:cNvPicPr>
@@ -18566,7 +18503,7 @@
       </p:sp>
       <p:pic>
         <p:nvPicPr>
-          <p:cNvPr id="18" name="Image 0" descr="/tmp/claude-1000/-opt-dersler/8a8328c3-841c-44fa-b76f-82572d338d3d/scratchpad/d4/sek/manyetik-alan-06.png">    </p:cNvPr>
+          <p:cNvPr id="18" name="Image 0" descr="/tmp/claude-1000/-opt-dersler/8a8328c3-841c-44fa-b76f-82572d338d3d/scratchpad/d5/sek/manyetik-alan-06.png">    </p:cNvPr>
           <p:cNvPicPr>
             <a:picLocks noChangeAspect="1"/>
           </p:cNvPicPr>
@@ -20005,7 +19942,7 @@
       </p:sp>
       <p:pic>
         <p:nvPicPr>
-          <p:cNvPr id="10" name="Image 0" descr="/tmp/claude-1000/-opt-dersler/8a8328c3-841c-44fa-b76f-82572d338d3d/scratchpad/d4/sek/manyetik-alan-uygulama-kart.jpg">    </p:cNvPr>
+          <p:cNvPr id="10" name="Image 0" descr="/tmp/claude-1000/-opt-dersler/8a8328c3-841c-44fa-b76f-82572d338d3d/scratchpad/d5/sek/manyetik-alan-uygulama-kart.jpg">    </p:cNvPr>
           <p:cNvPicPr>
             <a:picLocks noChangeAspect="1"/>
           </p:cNvPicPr>
@@ -20029,70 +19966,7 @@
       </p:pic>
       <p:sp>
         <p:nvSpPr>
-          <p:cNvPr id="11" name="Shape 8"/>
-          <p:cNvSpPr/>
-          <p:nvPr/>
-        </p:nvSpPr>
-        <p:spPr>
-          <a:xfrm>
-            <a:off x="9704527" y="4198925"/>
-            <a:ext cx="1755648" cy="246888"/>
-          </a:xfrm>
-          <a:prstGeom prst="roundRect">
-            <a:avLst>
-              <a:gd name="adj" fmla="val 48148"/>
-            </a:avLst>
-          </a:prstGeom>
-          <a:solidFill>
-            <a:srgbClr val="0E1426">
-              <a:alpha val="60000"/>
-            </a:srgbClr>
-          </a:solidFill>
-          <a:ln/>
-        </p:spPr>
-      </p:sp>
-      <p:sp>
-        <p:nvSpPr>
-          <p:cNvPr id="12" name="Text 9"/>
-          <p:cNvSpPr txBox="1"/>
-          <p:nvPr/>
-        </p:nvSpPr>
-        <p:spPr>
-          <a:xfrm>
-            <a:off x="9704527" y="4198925"/>
-            <a:ext cx="1755648" cy="246888"/>
-          </a:xfrm>
-          <a:prstGeom prst="rect">
-            <a:avLst/>
-          </a:prstGeom>
-          <a:noFill/>
-          <a:ln/>
-        </p:spPr>
-        <p:txBody>
-          <a:bodyPr wrap="square" lIns="0" tIns="0" rIns="0" bIns="0" rtlCol="0" anchor="ctr"/>
-          <a:lstStyle/>
-          <a:p>
-            <a:pPr algn="ctr" indent="0" marL="0">
-              <a:buNone/>
-            </a:pPr>
-            <a:r>
-              <a:rPr lang="en-US" sz="850" dirty="0">
-                <a:solidFill>
-                  <a:srgbClr val="FFFFFF"/>
-                </a:solidFill>
-                <a:latin typeface="Calibri" pitchFamily="34" charset="0"/>
-                <a:ea typeface="Calibri" pitchFamily="34" charset="-122"/>
-                <a:cs typeface="Calibri" pitchFamily="34" charset="-120"/>
-              </a:rPr>
-              <a:t>Yapay zekâ ile üretildi</a:t>
-            </a:r>
-            <a:endParaRPr lang="en-US" sz="850" dirty="0"/>
-          </a:p>
-        </p:txBody>
-      </p:sp>
-      <p:sp>
-        <p:nvSpPr>
-          <p:cNvPr id="13" name="Text 10"/>
+          <p:cNvPr id="11" name="Text 8"/>
           <p:cNvSpPr txBox="1"/>
           <p:nvPr/>
         </p:nvSpPr>
@@ -20151,7 +20025,7 @@
       </p:sp>
       <p:sp>
         <p:nvSpPr>
-          <p:cNvPr id="14" name="Shape 11"/>
+          <p:cNvPr id="12" name="Shape 9"/>
           <p:cNvSpPr/>
           <p:nvPr/>
         </p:nvSpPr>
@@ -20173,7 +20047,7 @@
       </p:sp>
       <p:sp>
         <p:nvSpPr>
-          <p:cNvPr id="15" name="Text 12"/>
+          <p:cNvPr id="13" name="Text 10"/>
           <p:cNvSpPr txBox="1"/>
           <p:nvPr/>
         </p:nvSpPr>
@@ -20212,7 +20086,7 @@
       </p:sp>
       <p:sp>
         <p:nvSpPr>
-          <p:cNvPr id="16" name="Text 13"/>
+          <p:cNvPr id="14" name="Text 11"/>
           <p:cNvSpPr txBox="1"/>
           <p:nvPr/>
         </p:nvSpPr>
@@ -26413,7 +26287,7 @@
       </p:sp>
       <p:pic>
         <p:nvPicPr>
-          <p:cNvPr id="11" name="Image 0" descr="/tmp/claude-1000/-opt-dersler/8a8328c3-841c-44fa-b76f-82572d338d3d/scratchpad/d4/sek/manyetik-alan-07.png">    </p:cNvPr>
+          <p:cNvPr id="11" name="Image 0" descr="/tmp/claude-1000/-opt-dersler/8a8328c3-841c-44fa-b76f-82572d338d3d/scratchpad/d5/sek/manyetik-alan-07.png">    </p:cNvPr>
           <p:cNvPicPr>
             <a:picLocks noChangeAspect="1"/>
           </p:cNvPicPr>
@@ -35623,7 +35497,7 @@
       </p:sp>
       <p:pic>
         <p:nvPicPr>
-          <p:cNvPr id="11" name="Image 0" descr="/tmp/claude-1000/-opt-dersler/8a8328c3-841c-44fa-b76f-82572d338d3d/scratchpad/d4/sek/manyetik-alan-gunluk-kart.jpg">    </p:cNvPr>
+          <p:cNvPr id="11" name="Image 0" descr="/tmp/claude-1000/-opt-dersler/8a8328c3-841c-44fa-b76f-82572d338d3d/scratchpad/d5/sek/manyetik-alan-gunluk-kart.jpg">    </p:cNvPr>
           <p:cNvPicPr>
             <a:picLocks noChangeAspect="1"/>
           </p:cNvPicPr>
@@ -35647,70 +35521,7 @@
       </p:pic>
       <p:sp>
         <p:nvSpPr>
-          <p:cNvPr id="12" name="Shape 9"/>
-          <p:cNvSpPr/>
-          <p:nvPr/>
-        </p:nvSpPr>
-        <p:spPr>
-          <a:xfrm>
-            <a:off x="9704527" y="4198925"/>
-            <a:ext cx="1755648" cy="246888"/>
-          </a:xfrm>
-          <a:prstGeom prst="roundRect">
-            <a:avLst>
-              <a:gd name="adj" fmla="val 48148"/>
-            </a:avLst>
-          </a:prstGeom>
-          <a:solidFill>
-            <a:srgbClr val="0E1426">
-              <a:alpha val="60000"/>
-            </a:srgbClr>
-          </a:solidFill>
-          <a:ln/>
-        </p:spPr>
-      </p:sp>
-      <p:sp>
-        <p:nvSpPr>
-          <p:cNvPr id="13" name="Text 10"/>
-          <p:cNvSpPr txBox="1"/>
-          <p:nvPr/>
-        </p:nvSpPr>
-        <p:spPr>
-          <a:xfrm>
-            <a:off x="9704527" y="4198925"/>
-            <a:ext cx="1755648" cy="246888"/>
-          </a:xfrm>
-          <a:prstGeom prst="rect">
-            <a:avLst/>
-          </a:prstGeom>
-          <a:noFill/>
-          <a:ln/>
-        </p:spPr>
-        <p:txBody>
-          <a:bodyPr wrap="square" lIns="0" tIns="0" rIns="0" bIns="0" rtlCol="0" anchor="ctr"/>
-          <a:lstStyle/>
-          <a:p>
-            <a:pPr algn="ctr" indent="0" marL="0">
-              <a:buNone/>
-            </a:pPr>
-            <a:r>
-              <a:rPr lang="en-US" sz="850" dirty="0">
-                <a:solidFill>
-                  <a:srgbClr val="FFFFFF"/>
-                </a:solidFill>
-                <a:latin typeface="Calibri" pitchFamily="34" charset="0"/>
-                <a:ea typeface="Calibri" pitchFamily="34" charset="-122"/>
-                <a:cs typeface="Calibri" pitchFamily="34" charset="-120"/>
-              </a:rPr>
-              <a:t>Yapay zekâ ile üretildi</a:t>
-            </a:r>
-            <a:endParaRPr lang="en-US" sz="850" dirty="0"/>
-          </a:p>
-        </p:txBody>
-      </p:sp>
-      <p:sp>
-        <p:nvSpPr>
-          <p:cNvPr id="14" name="Text 11"/>
+          <p:cNvPr id="12" name="Text 9"/>
           <p:cNvSpPr txBox="1"/>
           <p:nvPr/>
         </p:nvSpPr>
@@ -35820,7 +35631,7 @@
       </p:sp>
       <p:sp>
         <p:nvSpPr>
-          <p:cNvPr id="15" name="Shape 12"/>
+          <p:cNvPr id="13" name="Shape 10"/>
           <p:cNvSpPr/>
           <p:nvPr/>
         </p:nvSpPr>
@@ -35842,7 +35653,7 @@
       </p:sp>
       <p:sp>
         <p:nvSpPr>
-          <p:cNvPr id="16" name="Text 13"/>
+          <p:cNvPr id="14" name="Text 11"/>
           <p:cNvSpPr txBox="1"/>
           <p:nvPr/>
         </p:nvSpPr>
@@ -35881,7 +35692,7 @@
       </p:sp>
       <p:sp>
         <p:nvSpPr>
-          <p:cNvPr id="17" name="Text 14"/>
+          <p:cNvPr id="15" name="Text 12"/>
           <p:cNvSpPr txBox="1"/>
           <p:nvPr/>
         </p:nvSpPr>
@@ -41869,7 +41680,7 @@
       </p:sp>
       <p:pic>
         <p:nvPicPr>
-          <p:cNvPr id="15" name="Image 0" descr="/tmp/claude-1000/-opt-dersler/8a8328c3-841c-44fa-b76f-82572d338d3d/scratchpad/d4/sek/manyetik-alan-01.png">    </p:cNvPr>
+          <p:cNvPr id="15" name="Image 0" descr="/tmp/claude-1000/-opt-dersler/8a8328c3-841c-44fa-b76f-82572d338d3d/scratchpad/d5/sek/manyetik-alan-01.png">    </p:cNvPr>
           <p:cNvPicPr>
             <a:picLocks noChangeAspect="1"/>
           </p:cNvPicPr>
